--- a/260418_add/ppt/Fig4D_forest_immune3_native_editable.pptx
+++ b/260418_add/ppt/Fig4D_forest_immune3_native_editable.pptx
@@ -3817,7 +3817,7 @@
             <a:r>
               <a:rPr sz="800" b="1" i="0">
                 <a:solidFill>
-                  <a:srgbClr val="B58900"/>
+                  <a:srgbClr val="222222"/>
                 </a:solidFill>
                 <a:latin typeface="Arial"/>
               </a:rPr>
@@ -5688,9 +5688,9 @@
           <a:prstGeom prst="line">
             <a:avLst/>
           </a:prstGeom>
-          <a:ln w="22860">
+          <a:ln w="17780">
             <a:solidFill>
-              <a:srgbClr val="B58900"/>
+              <a:srgbClr val="0A7D6E"/>
             </a:solidFill>
           </a:ln>
           <a:effectLst/>
@@ -5725,11 +5725,11 @@
             <a:avLst/>
           </a:prstGeom>
           <a:solidFill>
-            <a:srgbClr val="B58900"/>
+            <a:srgbClr val="0A7D6E"/>
           </a:solidFill>
-          <a:ln w="16510">
+          <a:ln w="10160">
             <a:solidFill>
-              <a:srgbClr val="B58900"/>
+              <a:srgbClr val="FFFFFF"/>
             </a:solidFill>
           </a:ln>
           <a:effectLst/>
@@ -5781,13 +5781,13 @@
           <a:p>
             <a:pPr algn="r"/>
             <a:r>
-              <a:rPr sz="800" b="1" i="0">
+              <a:rPr sz="800" b="0" i="0">
                 <a:solidFill>
-                  <a:srgbClr val="B58900"/>
+                  <a:srgbClr val="222222"/>
                 </a:solidFill>
                 <a:latin typeface="Arial"/>
               </a:rPr>
-              <a:t>B-cell infiltration ★</a:t>
+              <a:t>B-cell infiltration</a:t>
             </a:r>
           </a:p>
         </p:txBody>
@@ -6612,9 +6612,9 @@
           <a:prstGeom prst="line">
             <a:avLst/>
           </a:prstGeom>
-          <a:ln w="22860">
+          <a:ln w="17780">
             <a:solidFill>
-              <a:srgbClr val="B58900"/>
+              <a:srgbClr val="C53E1F"/>
             </a:solidFill>
           </a:ln>
           <a:effectLst/>
@@ -6649,11 +6649,11 @@
             <a:avLst/>
           </a:prstGeom>
           <a:solidFill>
-            <a:srgbClr val="B58900"/>
+            <a:srgbClr val="C53E1F"/>
           </a:solidFill>
-          <a:ln w="16510">
+          <a:ln w="10160">
             <a:solidFill>
-              <a:srgbClr val="B58900"/>
+              <a:srgbClr val="FFFFFF"/>
             </a:solidFill>
           </a:ln>
           <a:effectLst/>
@@ -6705,13 +6705,13 @@
           <a:p>
             <a:pPr algn="r"/>
             <a:r>
-              <a:rPr sz="800" b="1" i="0">
+              <a:rPr sz="800" b="0" i="0">
                 <a:solidFill>
-                  <a:srgbClr val="B58900"/>
+                  <a:srgbClr val="222222"/>
                 </a:solidFill>
                 <a:latin typeface="Arial"/>
               </a:rPr>
-              <a:t>CD8 cytotoxic ★</a:t>
+              <a:t>CD8 cytotoxic</a:t>
             </a:r>
           </a:p>
         </p:txBody>
@@ -7382,9 +7382,9 @@
           <a:prstGeom prst="line">
             <a:avLst/>
           </a:prstGeom>
-          <a:ln w="22860">
+          <a:ln w="17780">
             <a:solidFill>
-              <a:srgbClr val="B58900"/>
+              <a:srgbClr val="0A7D6E"/>
             </a:solidFill>
           </a:ln>
           <a:effectLst/>
@@ -7419,11 +7419,11 @@
             <a:avLst/>
           </a:prstGeom>
           <a:solidFill>
-            <a:srgbClr val="B58900"/>
+            <a:srgbClr val="0A7D6E"/>
           </a:solidFill>
-          <a:ln w="16510">
+          <a:ln w="10160">
             <a:solidFill>
-              <a:srgbClr val="B58900"/>
+              <a:srgbClr val="FFFFFF"/>
             </a:solidFill>
           </a:ln>
           <a:effectLst/>
@@ -7475,13 +7475,13 @@
           <a:p>
             <a:pPr algn="r"/>
             <a:r>
-              <a:rPr sz="800" b="1" i="0">
+              <a:rPr sz="800" b="0" i="0">
                 <a:solidFill>
-                  <a:srgbClr val="B58900"/>
+                  <a:srgbClr val="222222"/>
                 </a:solidFill>
                 <a:latin typeface="Arial"/>
               </a:rPr>
-              <a:t>T-cell infiltration ★</a:t>
+              <a:t>T-cell infiltration</a:t>
             </a:r>
           </a:p>
         </p:txBody>
@@ -7524,95 +7524,13 @@
       </p:sp>
       <p:sp>
         <p:nvSpPr>
-          <p:cNvPr id="118" name="Oval 117"/>
+          <p:cNvPr id="118" name="Rectangle 117"/>
           <p:cNvSpPr/>
           <p:nvPr/>
         </p:nvSpPr>
         <p:spPr>
           <a:xfrm>
-            <a:off x="610080" y="6571968"/>
-            <a:ext cx="60000" cy="60000"/>
-          </a:xfrm>
-          <a:prstGeom prst="ellipse">
-            <a:avLst/>
-          </a:prstGeom>
-          <a:solidFill>
-            <a:srgbClr val="B58900"/>
-          </a:solidFill>
-          <a:ln w="12700">
-            <a:solidFill>
-              <a:srgbClr val="FFFFFF"/>
-            </a:solidFill>
-          </a:ln>
-          <a:effectLst/>
-        </p:spPr>
-        <p:style>
-          <a:lnRef idx="1">
-            <a:schemeClr val="accent1"/>
-          </a:lnRef>
-          <a:fillRef idx="3">
-            <a:schemeClr val="accent1"/>
-          </a:fillRef>
-          <a:effectRef idx="2">
-            <a:schemeClr val="accent1"/>
-          </a:effectRef>
-          <a:fontRef idx="minor">
-            <a:schemeClr val="lt1"/>
-          </a:fontRef>
-        </p:style>
-        <p:txBody>
-          <a:bodyPr rtlCol="0" anchor="ctr"/>
-          <a:lstStyle/>
-          <a:p>
-            <a:pPr algn="ctr"/>
-          </a:p>
-        </p:txBody>
-      </p:sp>
-      <p:sp>
-        <p:nvSpPr>
-          <p:cNvPr id="119" name="TextBox 118"/>
-          <p:cNvSpPr txBox="1"/>
-          <p:nvPr/>
-        </p:nvSpPr>
-        <p:spPr>
-          <a:xfrm>
-            <a:off x="731520" y="6537960"/>
-            <a:ext cx="5029200" cy="182880"/>
-          </a:xfrm>
-          <a:prstGeom prst="rect">
-            <a:avLst/>
-          </a:prstGeom>
-          <a:noFill/>
-          <a:effectLst/>
-        </p:spPr>
-        <p:txBody>
-          <a:bodyPr wrap="square" lIns="0" rIns="0" tIns="0" bIns="0" anchor="ctr">
-            <a:spAutoFit/>
-          </a:bodyPr>
-          <a:lstStyle/>
-          <a:p>
-            <a:pPr algn="l"/>
-            <a:r>
-              <a:rPr sz="800" b="0" i="1">
-                <a:solidFill>
-                  <a:srgbClr val="B58900"/>
-                </a:solidFill>
-                <a:latin typeface="Arial"/>
-              </a:rPr>
-              <a:t>★ purified immune signatures, externally validated (§3.12)</a:t>
-            </a:r>
-          </a:p>
-        </p:txBody>
-      </p:sp>
-      <p:sp>
-        <p:nvSpPr>
-          <p:cNvPr id="120" name="Rectangle 119"/>
-          <p:cNvSpPr/>
-          <p:nvPr/>
-        </p:nvSpPr>
-        <p:spPr>
-          <a:xfrm>
-            <a:off x="640080" y="6766560"/>
+            <a:off x="640080" y="6537960"/>
             <a:ext cx="128016" cy="91440"/>
           </a:xfrm>
           <a:prstGeom prst="rect">
@@ -7650,13 +7568,13 @@
       </p:sp>
       <p:sp>
         <p:nvSpPr>
-          <p:cNvPr id="121" name="TextBox 120"/>
+          <p:cNvPr id="119" name="TextBox 118"/>
           <p:cNvSpPr txBox="1"/>
           <p:nvPr/>
         </p:nvSpPr>
         <p:spPr>
           <a:xfrm>
-            <a:off x="822960" y="6739128"/>
+            <a:off x="822960" y="6510528"/>
             <a:ext cx="1828800" cy="164592"/>
           </a:xfrm>
           <a:prstGeom prst="rect">
@@ -7686,13 +7604,13 @@
       </p:sp>
       <p:sp>
         <p:nvSpPr>
-          <p:cNvPr id="122" name="Rectangle 121"/>
+          <p:cNvPr id="120" name="Rectangle 119"/>
           <p:cNvSpPr/>
           <p:nvPr/>
         </p:nvSpPr>
         <p:spPr>
           <a:xfrm>
-            <a:off x="2834640" y="6766560"/>
+            <a:off x="2834640" y="6537960"/>
             <a:ext cx="128016" cy="91440"/>
           </a:xfrm>
           <a:prstGeom prst="rect">
@@ -7730,13 +7648,13 @@
       </p:sp>
       <p:sp>
         <p:nvSpPr>
-          <p:cNvPr id="123" name="TextBox 122"/>
+          <p:cNvPr id="121" name="TextBox 120"/>
           <p:cNvSpPr txBox="1"/>
           <p:nvPr/>
         </p:nvSpPr>
         <p:spPr>
           <a:xfrm>
-            <a:off x="3017520" y="6739128"/>
+            <a:off x="3017520" y="6510528"/>
             <a:ext cx="2103120" cy="164592"/>
           </a:xfrm>
           <a:prstGeom prst="rect">
@@ -7766,13 +7684,13 @@
       </p:sp>
       <p:sp>
         <p:nvSpPr>
-          <p:cNvPr id="124" name="TextBox 123"/>
+          <p:cNvPr id="122" name="TextBox 121"/>
           <p:cNvSpPr txBox="1"/>
           <p:nvPr/>
         </p:nvSpPr>
         <p:spPr>
           <a:xfrm>
-            <a:off x="640080" y="6949440"/>
+            <a:off x="640080" y="6739128"/>
             <a:ext cx="5029200" cy="164592"/>
           </a:xfrm>
           <a:prstGeom prst="rect">
